--- a/documents/presentations/general/ACDC_Framework_Final_v6.pptx
+++ b/documents/presentations/general/ACDC_Framework_Final_v6.pptx
@@ -275,7 +275,7 @@
           <a:p>
             <a:fld id="{DF2B9998-7FC2-40BB-812D-D42712794F0A}" type="datetimeFigureOut">
               <a:rPr lang="en-US" smtClean="0"/>
-              <a:t>1/22/26</a:t>
+              <a:t>1/28/26</a:t>
             </a:fld>
             <a:endParaRPr lang="en-US"/>
           </a:p>
@@ -452,7 +452,7 @@
           <a:p>
             <a:fld id="{19EE1A3E-C737-584E-86B0-F484DE311626}" type="datetimeFigureOut">
               <a:rPr lang="en-US" smtClean="0"/>
-              <a:t>1/22/26</a:t>
+              <a:t>1/28/26</a:t>
             </a:fld>
             <a:endParaRPr lang="en-US"/>
           </a:p>
@@ -4590,7 +4590,7 @@
             <a:fld id="{A39D7527-A277-E24D-9A56-20081ADC979C}" type="datetime1">
               <a:rPr lang="en-US" smtClean="0"/>
               <a:pPr/>
-              <a:t>1/22/26</a:t>
+              <a:t>1/28/26</a:t>
             </a:fld>
             <a:endParaRPr lang="en-US" dirty="0"/>
           </a:p>
@@ -6208,12 +6208,7 @@
             <p:ph type="sldNum" sz="quarter" idx="12"/>
           </p:nvPr>
         </p:nvSpPr>
-        <p:spPr>
-          <a:xfrm>
-            <a:off x="8380520" y="4767263"/>
-            <a:ext cx="306280" cy="273844"/>
-          </a:xfrm>
-        </p:spPr>
+        <p:spPr/>
         <p:txBody>
           <a:bodyPr/>
           <a:lstStyle/>
@@ -7328,12 +7323,7 @@
             <p:ph type="sldNum" sz="quarter" idx="12"/>
           </p:nvPr>
         </p:nvSpPr>
-        <p:spPr>
-          <a:xfrm>
-            <a:off x="8380520" y="4767263"/>
-            <a:ext cx="306280" cy="273844"/>
-          </a:xfrm>
-        </p:spPr>
+        <p:spPr/>
         <p:txBody>
           <a:bodyPr/>
           <a:lstStyle/>
@@ -8757,12 +8747,7 @@
             <p:ph type="sldNum" sz="quarter" idx="12"/>
           </p:nvPr>
         </p:nvSpPr>
-        <p:spPr>
-          <a:xfrm>
-            <a:off x="8380520" y="4767263"/>
-            <a:ext cx="306280" cy="273844"/>
-          </a:xfrm>
-        </p:spPr>
+        <p:spPr/>
         <p:txBody>
           <a:bodyPr/>
           <a:lstStyle/>
@@ -9861,12 +9846,7 @@
             <p:ph type="sldNum" sz="quarter" idx="12"/>
           </p:nvPr>
         </p:nvSpPr>
-        <p:spPr>
-          <a:xfrm>
-            <a:off x="8380520" y="4767263"/>
-            <a:ext cx="306280" cy="273844"/>
-          </a:xfrm>
-        </p:spPr>
+        <p:spPr/>
         <p:txBody>
           <a:bodyPr/>
           <a:lstStyle/>
@@ -11157,12 +11137,7 @@
             <p:ph type="sldNum" sz="quarter" idx="12"/>
           </p:nvPr>
         </p:nvSpPr>
-        <p:spPr>
-          <a:xfrm>
-            <a:off x="8380520" y="4767263"/>
-            <a:ext cx="306280" cy="273844"/>
-          </a:xfrm>
-        </p:spPr>
+        <p:spPr/>
         <p:txBody>
           <a:bodyPr/>
           <a:lstStyle/>
@@ -11327,12 +11302,7 @@
                 <p:ph idx="1"/>
               </p:nvPr>
             </p:nvSpPr>
-            <p:spPr>
-              <a:xfrm>
-                <a:off x="800100" y="1111250"/>
-                <a:ext cx="7886700" cy="3521473"/>
-              </a:xfrm>
-            </p:spPr>
+            <p:spPr/>
             <p:txBody>
               <a:bodyPr>
                 <a:normAutofit fontScale="92500"/>
@@ -11612,10 +11582,6 @@
           </p:nvPr>
         </p:nvSpPr>
         <p:spPr>
-          <a:xfrm>
-            <a:off x="2500132" y="4767263"/>
-            <a:ext cx="4676172" cy="273844"/>
-          </a:xfrm>
           <a:prstGeom prst="rect">
             <a:avLst/>
           </a:prstGeom>
@@ -11767,10 +11733,6 @@
           </p:nvPr>
         </p:nvSpPr>
         <p:spPr>
-          <a:xfrm>
-            <a:off x="2500132" y="4767263"/>
-            <a:ext cx="4676172" cy="273844"/>
-          </a:xfrm>
           <a:prstGeom prst="rect">
             <a:avLst/>
           </a:prstGeom>
@@ -13628,7 +13590,7 @@
           <a:p>
             <a:r>
               <a:rPr lang="en-GB" dirty="0"/>
-              <a:t>The framework - conceptually</a:t>
+              <a:t>The framework model - conceptually</a:t>
             </a:r>
           </a:p>
         </p:txBody>
@@ -16590,7 +16552,7 @@
         <p:spPr>
           <a:xfrm>
             <a:off x="7263482" y="3938483"/>
-            <a:ext cx="1515924" cy="246221"/>
+            <a:ext cx="1681604" cy="246221"/>
           </a:xfrm>
           <a:prstGeom prst="rect">
             <a:avLst/>
@@ -16613,8 +16575,13 @@
             </a:pPr>
             <a:r>
               <a:rPr dirty="0"/>
-              <a:t>ACTUAL PRODUCTS</a:t>
-            </a:r>
+              <a:t>ACTUAL </a:t>
+            </a:r>
+            <a:r>
+              <a:rPr lang="da-DK" dirty="0"/>
+              <a:t>INGREDIENTS</a:t>
+            </a:r>
+            <a:endParaRPr dirty="0"/>
           </a:p>
         </p:txBody>
       </p:sp>
@@ -16744,12 +16711,7 @@
             <p:ph idx="1"/>
           </p:nvPr>
         </p:nvSpPr>
-        <p:spPr>
-          <a:xfrm>
-            <a:off x="800100" y="1111250"/>
-            <a:ext cx="7886700" cy="3521473"/>
-          </a:xfrm>
-        </p:spPr>
+        <p:spPr/>
         <p:txBody>
           <a:bodyPr>
             <a:normAutofit fontScale="55000" lnSpcReduction="20000"/>
@@ -16903,10 +16865,6 @@
           </p:nvPr>
         </p:nvSpPr>
         <p:spPr>
-          <a:xfrm>
-            <a:off x="2500132" y="4767263"/>
-            <a:ext cx="4676172" cy="273844"/>
-          </a:xfrm>
           <a:prstGeom prst="rect">
             <a:avLst/>
           </a:prstGeom>
@@ -16993,36 +16951,6 @@
           </a:prstGeom>
         </p:spPr>
       </p:pic>
-      <p:pic>
-        <p:nvPicPr>
-          <p:cNvPr id="59" name="Picture 58">
-            <a:extLst>
-              <a:ext uri="{FF2B5EF4-FFF2-40B4-BE49-F238E27FC236}">
-                <a16:creationId xmlns:a16="http://schemas.microsoft.com/office/drawing/2014/main" id="{D76954B5-41DA-C4A9-6F11-55AC099FEF97}"/>
-              </a:ext>
-            </a:extLst>
-          </p:cNvPr>
-          <p:cNvPicPr>
-            <a:picLocks noChangeAspect="1"/>
-          </p:cNvPicPr>
-          <p:nvPr/>
-        </p:nvPicPr>
-        <p:blipFill>
-          <a:blip r:embed="rId4"/>
-          <a:stretch>
-            <a:fillRect/>
-          </a:stretch>
-        </p:blipFill>
-        <p:spPr>
-          <a:xfrm>
-            <a:off x="5601504" y="3396457"/>
-            <a:ext cx="1352550" cy="1644650"/>
-          </a:xfrm>
-          <a:prstGeom prst="rect">
-            <a:avLst/>
-          </a:prstGeom>
-        </p:spPr>
-      </p:pic>
       <p:sp>
         <p:nvSpPr>
           <p:cNvPr id="60" name="TextBox 59">
@@ -17058,6 +16986,36 @@
           </a:p>
         </p:txBody>
       </p:sp>
+      <p:pic>
+        <p:nvPicPr>
+          <p:cNvPr id="27" name="Picture 26">
+            <a:extLst>
+              <a:ext uri="{FF2B5EF4-FFF2-40B4-BE49-F238E27FC236}">
+                <a16:creationId xmlns:a16="http://schemas.microsoft.com/office/drawing/2014/main" id="{219194BC-A350-27FB-7A23-BF35F7D5461E}"/>
+              </a:ext>
+            </a:extLst>
+          </p:cNvPr>
+          <p:cNvPicPr>
+            <a:picLocks noChangeAspect="1"/>
+          </p:cNvPicPr>
+          <p:nvPr/>
+        </p:nvPicPr>
+        <p:blipFill>
+          <a:blip r:embed="rId4"/>
+          <a:stretch>
+            <a:fillRect/>
+          </a:stretch>
+        </p:blipFill>
+        <p:spPr>
+          <a:xfrm>
+            <a:off x="5569754" y="3196372"/>
+            <a:ext cx="1520002" cy="1855401"/>
+          </a:xfrm>
+          <a:prstGeom prst="rect">
+            <a:avLst/>
+          </a:prstGeom>
+        </p:spPr>
+      </p:pic>
     </p:spTree>
   </p:cSld>
   <p:clrMapOvr>
@@ -17493,10 +17451,6 @@
           </p:nvPr>
         </p:nvSpPr>
         <p:spPr>
-          <a:xfrm>
-            <a:off x="2500132" y="4767263"/>
-            <a:ext cx="4676172" cy="273844"/>
-          </a:xfrm>
           <a:prstGeom prst="rect">
             <a:avLst/>
           </a:prstGeom>
@@ -17814,12 +17768,7 @@
             <p:ph type="sldNum" sz="quarter" idx="12"/>
           </p:nvPr>
         </p:nvSpPr>
-        <p:spPr>
-          <a:xfrm>
-            <a:off x="8380520" y="4767263"/>
-            <a:ext cx="306280" cy="273844"/>
-          </a:xfrm>
-        </p:spPr>
+        <p:spPr/>
         <p:txBody>
           <a:bodyPr/>
           <a:lstStyle/>
@@ -18029,12 +17978,7 @@
             <p:ph type="sldNum" sz="quarter" idx="12"/>
           </p:nvPr>
         </p:nvSpPr>
-        <p:spPr>
-          <a:xfrm>
-            <a:off x="8380520" y="4767263"/>
-            <a:ext cx="306280" cy="273844"/>
-          </a:xfrm>
-        </p:spPr>
+        <p:spPr/>
         <p:txBody>
           <a:bodyPr/>
           <a:lstStyle/>
@@ -18247,12 +18191,7 @@
             <p:ph type="sldNum" sz="quarter" idx="12"/>
           </p:nvPr>
         </p:nvSpPr>
-        <p:spPr>
-          <a:xfrm>
-            <a:off x="8380520" y="4767263"/>
-            <a:ext cx="306280" cy="273844"/>
-          </a:xfrm>
-        </p:spPr>
+        <p:spPr/>
         <p:txBody>
           <a:bodyPr/>
           <a:lstStyle/>
@@ -18721,50 +18660,6 @@
       </p:sp>
       <p:sp>
         <p:nvSpPr>
-          <p:cNvPr id="7" name="TextBox 6">
-            <a:extLst>
-              <a:ext uri="{FF2B5EF4-FFF2-40B4-BE49-F238E27FC236}">
-                <a16:creationId xmlns:a16="http://schemas.microsoft.com/office/drawing/2014/main" id="{290E5E08-BB91-3D6A-CC65-6A46E1A2D4FC}"/>
-              </a:ext>
-            </a:extLst>
-          </p:cNvPr>
-          <p:cNvSpPr txBox="1"/>
-          <p:nvPr/>
-        </p:nvSpPr>
-        <p:spPr>
-          <a:xfrm>
-            <a:off x="2709862" y="4334979"/>
-            <a:ext cx="4003976" cy="693712"/>
-          </a:xfrm>
-          <a:prstGeom prst="rect">
-            <a:avLst/>
-          </a:prstGeom>
-          <a:noFill/>
-        </p:spPr>
-        <p:txBody>
-          <a:bodyPr wrap="square" rtlCol="0">
-            <a:spAutoFit/>
-          </a:bodyPr>
-          <a:lstStyle/>
-          <a:p>
-            <a:r>
-              <a:rPr lang="en-GB" b="1" dirty="0"/>
-              <a:t>The recipe didn't change.</a:t>
-            </a:r>
-          </a:p>
-          <a:p>
-            <a:r>
-              <a:rPr lang="en-GB" dirty="0"/>
-              <a:t>Only the pantry labelling changed.</a:t>
-            </a:r>
-          </a:p>
-          <a:p>
-            <a:endParaRPr lang="en-GB" dirty="0"/>
-          </a:p>
-        </p:txBody>
-      </p:sp>
-      <p:sp>
-        <p:nvSpPr>
           <p:cNvPr id="3" name="Slide Number Placeholder 5">
             <a:extLst>
               <a:ext uri="{FF2B5EF4-FFF2-40B4-BE49-F238E27FC236}">
@@ -18779,12 +18674,7 @@
             <p:ph type="sldNum" sz="quarter" idx="12"/>
           </p:nvPr>
         </p:nvSpPr>
-        <p:spPr>
-          <a:xfrm>
-            <a:off x="8380520" y="4767263"/>
-            <a:ext cx="306280" cy="273844"/>
-          </a:xfrm>
-        </p:spPr>
+        <p:spPr/>
         <p:txBody>
           <a:bodyPr/>
           <a:lstStyle/>
@@ -18795,6 +18685,50 @@
               <a:t>26</a:t>
             </a:fld>
             <a:endParaRPr lang="en-US" dirty="0"/>
+          </a:p>
+        </p:txBody>
+      </p:sp>
+      <p:sp>
+        <p:nvSpPr>
+          <p:cNvPr id="7" name="TextBox 6">
+            <a:extLst>
+              <a:ext uri="{FF2B5EF4-FFF2-40B4-BE49-F238E27FC236}">
+                <a16:creationId xmlns:a16="http://schemas.microsoft.com/office/drawing/2014/main" id="{290E5E08-BB91-3D6A-CC65-6A46E1A2D4FC}"/>
+              </a:ext>
+            </a:extLst>
+          </p:cNvPr>
+          <p:cNvSpPr txBox="1"/>
+          <p:nvPr/>
+        </p:nvSpPr>
+        <p:spPr>
+          <a:xfrm>
+            <a:off x="2709862" y="4334979"/>
+            <a:ext cx="4003976" cy="693712"/>
+          </a:xfrm>
+          <a:prstGeom prst="rect">
+            <a:avLst/>
+          </a:prstGeom>
+          <a:noFill/>
+        </p:spPr>
+        <p:txBody>
+          <a:bodyPr wrap="square" rtlCol="0">
+            <a:spAutoFit/>
+          </a:bodyPr>
+          <a:lstStyle/>
+          <a:p>
+            <a:r>
+              <a:rPr lang="en-GB" b="1" dirty="0"/>
+              <a:t>The recipe didn't change.</a:t>
+            </a:r>
+          </a:p>
+          <a:p>
+            <a:r>
+              <a:rPr lang="en-GB" dirty="0"/>
+              <a:t>Only the pantry labelling changed.</a:t>
+            </a:r>
+          </a:p>
+          <a:p>
+            <a:endParaRPr lang="en-GB" dirty="0"/>
           </a:p>
         </p:txBody>
       </p:sp>
@@ -19210,10 +19144,6 @@
           </p:nvPr>
         </p:nvSpPr>
         <p:spPr>
-          <a:xfrm>
-            <a:off x="2500132" y="4767263"/>
-            <a:ext cx="4676172" cy="273844"/>
-          </a:xfrm>
           <a:prstGeom prst="rect">
             <a:avLst/>
           </a:prstGeom>
@@ -19336,12 +19266,7 @@
             <p:ph idx="1"/>
           </p:nvPr>
         </p:nvSpPr>
-        <p:spPr>
-          <a:xfrm>
-            <a:off x="800100" y="1111250"/>
-            <a:ext cx="7886700" cy="3521473"/>
-          </a:xfrm>
-        </p:spPr>
+        <p:spPr/>
         <p:txBody>
           <a:bodyPr>
             <a:normAutofit fontScale="77000" lnSpcReduction="20000"/>
@@ -19564,10 +19489,6 @@
           </p:nvPr>
         </p:nvSpPr>
         <p:spPr>
-          <a:xfrm>
-            <a:off x="2500132" y="4767263"/>
-            <a:ext cx="4676172" cy="273844"/>
-          </a:xfrm>
           <a:prstGeom prst="rect">
             <a:avLst/>
           </a:prstGeom>
@@ -19752,12 +19673,7 @@
             <p:ph idx="1"/>
           </p:nvPr>
         </p:nvSpPr>
-        <p:spPr>
-          <a:xfrm>
-            <a:off x="800100" y="1111250"/>
-            <a:ext cx="7886700" cy="3521473"/>
-          </a:xfrm>
-        </p:spPr>
+        <p:spPr/>
         <p:txBody>
           <a:bodyPr>
             <a:normAutofit fontScale="99500"/>
@@ -19907,10 +19823,6 @@
           </p:nvPr>
         </p:nvSpPr>
         <p:spPr>
-          <a:xfrm>
-            <a:off x="2500132" y="4767263"/>
-            <a:ext cx="4676172" cy="273844"/>
-          </a:xfrm>
           <a:prstGeom prst="rect">
             <a:avLst/>
           </a:prstGeom>
@@ -20005,12 +19917,7 @@
             <p:ph idx="1"/>
           </p:nvPr>
         </p:nvSpPr>
-        <p:spPr>
-          <a:xfrm>
-            <a:off x="800100" y="1111250"/>
-            <a:ext cx="7886700" cy="3521473"/>
-          </a:xfrm>
-        </p:spPr>
+        <p:spPr/>
         <p:txBody>
           <a:bodyPr>
             <a:normAutofit fontScale="52500" lnSpcReduction="20000"/>
@@ -20198,10 +20105,6 @@
           </p:nvPr>
         </p:nvSpPr>
         <p:spPr>
-          <a:xfrm>
-            <a:off x="2500132" y="4767263"/>
-            <a:ext cx="4676172" cy="273844"/>
-          </a:xfrm>
           <a:prstGeom prst="rect">
             <a:avLst/>
           </a:prstGeom>
@@ -22383,12 +22286,7 @@
             <p:ph type="sldNum" sz="quarter" idx="12"/>
           </p:nvPr>
         </p:nvSpPr>
-        <p:spPr>
-          <a:xfrm>
-            <a:off x="8380520" y="4767263"/>
-            <a:ext cx="306280" cy="273844"/>
-          </a:xfrm>
-        </p:spPr>
+        <p:spPr/>
         <p:txBody>
           <a:bodyPr/>
           <a:lstStyle/>
@@ -22655,10 +22553,6 @@
           </p:nvPr>
         </p:nvSpPr>
         <p:spPr>
-          <a:xfrm>
-            <a:off x="2500132" y="4767263"/>
-            <a:ext cx="4676172" cy="273844"/>
-          </a:xfrm>
           <a:prstGeom prst="rect">
             <a:avLst/>
           </a:prstGeom>
@@ -22954,10 +22848,6 @@
           </p:nvPr>
         </p:nvSpPr>
         <p:spPr>
-          <a:xfrm>
-            <a:off x="2500132" y="4767263"/>
-            <a:ext cx="4676172" cy="273844"/>
-          </a:xfrm>
           <a:prstGeom prst="rect">
             <a:avLst/>
           </a:prstGeom>
@@ -23258,10 +23148,6 @@
           </p:nvPr>
         </p:nvSpPr>
         <p:spPr>
-          <a:xfrm>
-            <a:off x="2500132" y="4767263"/>
-            <a:ext cx="4676172" cy="273844"/>
-          </a:xfrm>
           <a:prstGeom prst="rect">
             <a:avLst/>
           </a:prstGeom>
@@ -23651,12 +23537,7 @@
             <p:ph type="sldNum" sz="quarter" idx="12"/>
           </p:nvPr>
         </p:nvSpPr>
-        <p:spPr>
-          <a:xfrm>
-            <a:off x="8380520" y="4767263"/>
-            <a:ext cx="306280" cy="273844"/>
-          </a:xfrm>
-        </p:spPr>
+        <p:spPr/>
         <p:txBody>
           <a:bodyPr/>
           <a:lstStyle/>
@@ -23877,12 +23758,7 @@
             <p:ph type="sldNum" sz="quarter" idx="12"/>
           </p:nvPr>
         </p:nvSpPr>
-        <p:spPr>
-          <a:xfrm>
-            <a:off x="8380520" y="4767263"/>
-            <a:ext cx="306280" cy="273844"/>
-          </a:xfrm>
-        </p:spPr>
+        <p:spPr/>
         <p:txBody>
           <a:bodyPr/>
           <a:lstStyle/>
@@ -24173,10 +24049,6 @@
           </p:nvPr>
         </p:nvSpPr>
         <p:spPr>
-          <a:xfrm>
-            <a:off x="2500132" y="4767263"/>
-            <a:ext cx="4676172" cy="273844"/>
-          </a:xfrm>
           <a:prstGeom prst="rect">
             <a:avLst/>
           </a:prstGeom>
@@ -27896,12 +27768,7 @@
             <p:ph type="sldNum" sz="quarter" idx="12"/>
           </p:nvPr>
         </p:nvSpPr>
-        <p:spPr>
-          <a:xfrm>
-            <a:off x="8380520" y="4767263"/>
-            <a:ext cx="306280" cy="273844"/>
-          </a:xfrm>
-        </p:spPr>
+        <p:spPr/>
         <p:txBody>
           <a:bodyPr/>
           <a:lstStyle/>
@@ -28986,12 +28853,7 @@
             <p:ph type="sldNum" sz="quarter" idx="12"/>
           </p:nvPr>
         </p:nvSpPr>
-        <p:spPr>
-          <a:xfrm>
-            <a:off x="8380520" y="4767263"/>
-            <a:ext cx="306280" cy="273844"/>
-          </a:xfrm>
-        </p:spPr>
+        <p:spPr/>
         <p:txBody>
           <a:bodyPr/>
           <a:lstStyle/>
